--- a/docs/Talent-Cloud-status-2026-10-20.pptx
+++ b/docs/Talent-Cloud-status-2026-10-20.pptx
@@ -355,7 +355,7 @@
                 <a:latin typeface="Montserrat"/>
                 <a:ea typeface="Montserrat"/>
               </a:rPr>
-              <a:t>321</a:t>
+              <a:t>320</a:t>
             </a:r>
           </a:p>
         </p:txBody>
@@ -499,7 +499,7 @@
                 <a:latin typeface="Montserrat"/>
                 <a:ea typeface="Montserrat"/>
               </a:rPr>
-              <a:t>214</a:t>
+              <a:t>215</a:t>
             </a:r>
           </a:p>
         </p:txBody>
@@ -1603,7 +1603,7 @@
                 <a:latin typeface="Inter"/>
                 <a:ea typeface="Inter"/>
               </a:rPr>
-              <a:t>Counted in the task tracker today: 321 closed, 47 open. None of the 47 is a bug waiting to be found.</a:t>
+              <a:t>Counted in the task tracker today: 320 closed, 47 open. None of the 47 is a bug waiting to be found.</a:t>
             </a:r>
           </a:p>
         </p:txBody>
@@ -4751,7 +4751,7 @@
                 <a:latin typeface="Inter"/>
                 <a:ea typeface="Inter"/>
               </a:rPr>
-              <a:t>It is the price of 214 commits at this pace.</a:t>
+              <a:t>It is the price of 215 commits at this pace.</a:t>
             </a:r>
           </a:p>
           <a:p>
@@ -6518,7 +6518,7 @@
                 <a:latin typeface="Inter"/>
                 <a:ea typeface="Inter"/>
               </a:rPr>
-              <a:t>· 499 .from() calls in 81 files, with PostgREST</a:t>
+              <a:t>· 444 table reads in 65 files, plus 26 bucket refs, with PostgREST</a:t>
             </a:r>
             <a:br/>
             <a:r>
@@ -6584,7 +6584,7 @@
                 <a:latin typeface="Inter"/>
                 <a:ea typeface="Inter"/>
               </a:rPr>
-              <a:t>· Vercel for cron, for the environment, and for</a:t>
+              <a:t>· Vercel still holds cron and the environment;</a:t>
             </a:r>
             <a:br/>
             <a:r>
@@ -6595,7 +6595,7 @@
                 <a:latin typeface="Inter"/>
                 <a:ea typeface="Inter"/>
               </a:rPr>
-              <a:t>  the host name baked into an assessment link</a:t>
+              <a:t>  assessment links now use APP_URL (#313)</a:t>
             </a:r>
           </a:p>
         </p:txBody>
@@ -6737,7 +6737,7 @@
                 <a:latin typeface="Inter"/>
                 <a:ea typeface="Inter"/>
               </a:rPr>
-              <a:t>4. Self-host PostgREST, so the 499 queries stay.</a:t>
+              <a:t>4. Self-host PostgREST, so the 444 queries stay.</a:t>
             </a:r>
             <a:br/>
             <a:r>
@@ -7368,7 +7368,7 @@
                 <a:latin typeface="Inter"/>
                 <a:ea typeface="Inter"/>
               </a:rPr>
-              <a:t>second app server, and any design that asks me to rewrite 499 queries.</a:t>
+              <a:t>second app server, and any design that asks me to rewrite some 470 query call sites.</a:t>
             </a:r>
             <a:br/>
             <a:r>
@@ -8241,7 +8241,7 @@
                 <a:latin typeface="Inter"/>
                 <a:ea typeface="Inter"/>
               </a:rPr>
-              <a:t>Sharm Dreams Talent Cloud · state of the build · 20 October 2026 · figures taken from the repository at commit 38f6ca2</a:t>
+              <a:t>Sharm Dreams Talent Cloud · state of the build · 20 October 2026 · figures taken from the repository at commit 7eb9f96</a:t>
             </a:r>
           </a:p>
         </p:txBody>
@@ -9049,7 +9049,7 @@
                 <a:latin typeface="Inter"/>
                 <a:ea typeface="Inter"/>
               </a:rPr>
-              <a:t>Counted from the working tree at commit 38f6ca2, 20 October 2026.</a:t>
+              <a:t>Counted from the working tree at commit 7eb9f96, 20 October 2026.</a:t>
             </a:r>
           </a:p>
         </p:txBody>
@@ -9161,7 +9161,7 @@
                 <a:latin typeface="Montserrat"/>
                 <a:ea typeface="Montserrat"/>
               </a:rPr>
-              <a:t>214</a:t>
+              <a:t>215</a:t>
             </a:r>
           </a:p>
         </p:txBody>
